--- a/Slides/MiCM_Stats_RNAseq.pptx
+++ b/Slides/MiCM_Stats_RNAseq.pptx
@@ -1380,7 +1380,7 @@
           <a:p>
             <a:fld id="{217E5156-1B5D-054E-B5B2-E1B1BA160252}" type="datetimeFigureOut">
               <a:rPr lang="fr-FR" smtClean="0"/>
-              <a:t>26/05/2026</a:t>
+              <a:t>02/06/2026</a:t>
             </a:fld>
             <a:endParaRPr lang="fr-FR"/>
           </a:p>
@@ -1641,7 +1641,7 @@
       </p:grpSpPr>
       <p:sp>
         <p:nvSpPr>
-          <p:cNvPr id="2" name="Espace réservé de l'image des diapositives 1"/>
+          <p:cNvPr id="2" name="Slide Image Placeholder 1"/>
           <p:cNvSpPr>
             <a:spLocks noGrp="1" noRot="1" noChangeAspect="1"/>
           </p:cNvSpPr>
@@ -1649,23 +1649,11 @@
             <p:ph type="sldImg"/>
           </p:nvPr>
         </p:nvSpPr>
-        <p:spPr>
-          <a:xfrm>
-            <a:off x="1371600" y="1143000"/>
-            <a:ext cx="4114800" cy="3086100"/>
-          </a:xfrm>
-        </p:spPr>
-        <p:txBody>
-          <a:bodyPr/>
-          <a:lstStyle/>
-          <a:p>
-            <a:endParaRPr lang="en-CA"/>
-          </a:p>
-        </p:txBody>
+        <p:spPr/>
       </p:sp>
       <p:sp>
         <p:nvSpPr>
-          <p:cNvPr id="3" name="Espace réservé des notes 2"/>
+          <p:cNvPr id="3" name="Notes Placeholder 2"/>
           <p:cNvSpPr>
             <a:spLocks noGrp="1"/>
           </p:cNvSpPr>
@@ -1678,165 +1666,13 @@
           <a:bodyPr/>
           <a:lstStyle/>
           <a:p>
-            <a:pPr marL="0" marR="0" lvl="0" indent="0" algn="l" defTabSz="914400" rtl="0" eaLnBrk="1" fontAlgn="auto" latinLnBrk="0" hangingPunct="1">
-              <a:lnSpc>
-                <a:spcPct val="100000"/>
-              </a:lnSpc>
-              <a:spcBef>
-                <a:spcPts val="0"/>
-              </a:spcBef>
-              <a:spcAft>
-                <a:spcPts val="0"/>
-              </a:spcAft>
-              <a:buClrTx/>
-              <a:buSzTx/>
-              <a:buFontTx/>
-              <a:buNone/>
-              <a:tabLst/>
-              <a:defRPr/>
-            </a:pPr>
-            <a:r>
-              <a:rPr lang="en-CA" sz="1200" dirty="0"/>
-              <a:t>The McGill initiative on Computational Medicine was formed in 2017 and aims to deliver inter-disciplinary research programs and empower the use of data in health research and health care delivery</a:t>
-            </a:r>
-          </a:p>
-          <a:p>
-            <a:pPr marL="0" marR="0" lvl="0" indent="0" algn="l" defTabSz="914400" rtl="0" eaLnBrk="1" fontAlgn="auto" latinLnBrk="0" hangingPunct="1">
-              <a:lnSpc>
-                <a:spcPct val="100000"/>
-              </a:lnSpc>
-              <a:spcBef>
-                <a:spcPts val="0"/>
-              </a:spcBef>
-              <a:spcAft>
-                <a:spcPts val="0"/>
-              </a:spcAft>
-              <a:buClrTx/>
-              <a:buSzTx/>
-              <a:buFontTx/>
-              <a:buNone/>
-              <a:tabLst/>
-              <a:defRPr/>
-            </a:pPr>
-            <a:r>
-              <a:rPr lang="en-CA" sz="1200" dirty="0"/>
-              <a:t>Located at the Genome Center</a:t>
-            </a:r>
-          </a:p>
-          <a:p>
-            <a:pPr marL="0" marR="0" lvl="0" indent="0" algn="l" defTabSz="914400" rtl="0" eaLnBrk="1" fontAlgn="auto" latinLnBrk="0" hangingPunct="1">
-              <a:lnSpc>
-                <a:spcPct val="100000"/>
-              </a:lnSpc>
-              <a:spcBef>
-                <a:spcPts val="0"/>
-              </a:spcBef>
-              <a:spcAft>
-                <a:spcPts val="0"/>
-              </a:spcAft>
-              <a:buClrTx/>
-              <a:buSzTx/>
-              <a:buFontTx/>
-              <a:buNone/>
-              <a:tabLst/>
-              <a:defRPr/>
-            </a:pPr>
-            <a:endParaRPr lang="en-CA" sz="1200" dirty="0"/>
-          </a:p>
-          <a:p>
-            <a:pPr marL="0" marR="0" lvl="0" indent="0" algn="l" defTabSz="914400" rtl="0" eaLnBrk="1" fontAlgn="auto" latinLnBrk="0" hangingPunct="1">
-              <a:lnSpc>
-                <a:spcPct val="100000"/>
-              </a:lnSpc>
-              <a:spcBef>
-                <a:spcPts val="0"/>
-              </a:spcBef>
-              <a:spcAft>
-                <a:spcPts val="0"/>
-              </a:spcAft>
-              <a:buClrTx/>
-              <a:buSzTx/>
-              <a:buFontTx/>
-              <a:buNone/>
-              <a:tabLst/>
-              <a:defRPr/>
-            </a:pPr>
-            <a:endParaRPr lang="en-CA" sz="1200" dirty="0"/>
-          </a:p>
-          <a:p>
-            <a:pPr marL="0" marR="0" lvl="0" indent="0" algn="l" defTabSz="914400" rtl="0" eaLnBrk="1" fontAlgn="auto" latinLnBrk="0" hangingPunct="1">
-              <a:lnSpc>
-                <a:spcPct val="100000"/>
-              </a:lnSpc>
-              <a:spcBef>
-                <a:spcPts val="0"/>
-              </a:spcBef>
-              <a:spcAft>
-                <a:spcPts val="0"/>
-              </a:spcAft>
-              <a:buClrTx/>
-              <a:buSzTx/>
-              <a:buFontTx/>
-              <a:buNone/>
-              <a:tabLst/>
-              <a:defRPr/>
-            </a:pPr>
-            <a:r>
-              <a:rPr lang="en-CA" sz="1200" dirty="0"/>
-              <a:t>They have a newsletter were you can subscribe to </a:t>
-            </a:r>
-          </a:p>
-          <a:p>
-            <a:pPr marL="0" marR="0" lvl="0" indent="0" algn="l" defTabSz="914400" rtl="0" eaLnBrk="1" fontAlgn="auto" latinLnBrk="0" hangingPunct="1">
-              <a:lnSpc>
-                <a:spcPct val="100000"/>
-              </a:lnSpc>
-              <a:spcBef>
-                <a:spcPts val="0"/>
-              </a:spcBef>
-              <a:spcAft>
-                <a:spcPts val="0"/>
-              </a:spcAft>
-              <a:buClrTx/>
-              <a:buSzTx/>
-              <a:buFontTx/>
-              <a:buNone/>
-              <a:tabLst/>
-              <a:defRPr/>
-            </a:pPr>
-            <a:endParaRPr lang="en-CA" sz="1200" dirty="0"/>
-          </a:p>
-          <a:p>
-            <a:pPr marL="0" marR="0" lvl="0" indent="0" algn="l" defTabSz="914400" rtl="0" eaLnBrk="1" fontAlgn="auto" latinLnBrk="0" hangingPunct="1">
-              <a:lnSpc>
-                <a:spcPct val="100000"/>
-              </a:lnSpc>
-              <a:spcBef>
-                <a:spcPts val="0"/>
-              </a:spcBef>
-              <a:spcAft>
-                <a:spcPts val="0"/>
-              </a:spcAft>
-              <a:buClrTx/>
-              <a:buSzTx/>
-              <a:buFontTx/>
-              <a:buNone/>
-              <a:tabLst/>
-              <a:defRPr/>
-            </a:pPr>
-            <a:r>
-              <a:rPr lang="en-CA" sz="1200" dirty="0"/>
-              <a:t>more info on the web site</a:t>
-            </a:r>
-          </a:p>
-          <a:p>
             <a:endParaRPr lang="en-CA" dirty="0"/>
           </a:p>
         </p:txBody>
       </p:sp>
       <p:sp>
         <p:nvSpPr>
-          <p:cNvPr id="4" name="Espace réservé du numéro de diapositive 3"/>
+          <p:cNvPr id="4" name="Slide Number Placeholder 3"/>
           <p:cNvSpPr>
             <a:spLocks noGrp="1"/>
           </p:cNvSpPr>
@@ -1851,7 +1687,7 @@
           <a:p>
             <a:fld id="{DACBD60B-517C-4242-AE46-E1BD2D086542}" type="slidenum">
               <a:rPr lang="fr-FR" smtClean="0"/>
-              <a:t>2</a:t>
+              <a:t>1</a:t>
             </a:fld>
             <a:endParaRPr lang="fr-FR"/>
           </a:p>
@@ -1860,7 +1696,7 @@
     </p:spTree>
     <p:extLst>
       <p:ext uri="{BB962C8B-B14F-4D97-AF65-F5344CB8AC3E}">
-        <p14:creationId xmlns:p14="http://schemas.microsoft.com/office/powerpoint/2010/main" val="3840063572"/>
+        <p14:creationId xmlns:p14="http://schemas.microsoft.com/office/powerpoint/2010/main" val="2459672811"/>
       </p:ext>
     </p:extLst>
   </p:cSld>
@@ -1871,6 +1707,122 @@
 </file>
 
 <file path=ppt/notesSlides/notesSlide10.xml><?xml version="1.0" encoding="utf-8"?>
+<p:notes xmlns:a="http://schemas.openxmlformats.org/drawingml/2006/main" xmlns:r="http://schemas.openxmlformats.org/officeDocument/2006/relationships" xmlns:p="http://schemas.openxmlformats.org/presentationml/2006/main" showMasterSp="0" showMasterPhAnim="0">
+  <p:cSld>
+    <p:spTree>
+      <p:nvGrpSpPr>
+        <p:cNvPr id="1" name="Shape 273"/>
+        <p:cNvGrpSpPr/>
+        <p:nvPr/>
+      </p:nvGrpSpPr>
+      <p:grpSpPr>
+        <a:xfrm>
+          <a:off x="0" y="0"/>
+          <a:ext cx="0" cy="0"/>
+          <a:chOff x="0" y="0"/>
+          <a:chExt cx="0" cy="0"/>
+        </a:xfrm>
+      </p:grpSpPr>
+      <p:sp>
+        <p:nvSpPr>
+          <p:cNvPr id="274" name="Google Shape;274;g27dfae2cb10_1_157:notes"/>
+          <p:cNvSpPr>
+            <a:spLocks noGrp="1" noRot="1" noChangeAspect="1"/>
+          </p:cNvSpPr>
+          <p:nvPr>
+            <p:ph type="sldImg" idx="2"/>
+          </p:nvPr>
+        </p:nvSpPr>
+        <p:spPr>
+          <a:xfrm>
+            <a:off x="381000" y="685800"/>
+            <a:ext cx="6096000" cy="3429000"/>
+          </a:xfrm>
+          <a:custGeom>
+            <a:avLst/>
+            <a:gdLst/>
+            <a:ahLst/>
+            <a:cxnLst/>
+            <a:rect l="l" t="t" r="r" b="b"/>
+            <a:pathLst>
+              <a:path w="120000" h="120000" extrusionOk="0">
+                <a:moveTo>
+                  <a:pt x="0" y="0"/>
+                </a:moveTo>
+                <a:lnTo>
+                  <a:pt x="120000" y="0"/>
+                </a:lnTo>
+                <a:lnTo>
+                  <a:pt x="120000" y="120000"/>
+                </a:lnTo>
+                <a:lnTo>
+                  <a:pt x="0" y="120000"/>
+                </a:lnTo>
+                <a:close/>
+              </a:path>
+            </a:pathLst>
+          </a:custGeom>
+        </p:spPr>
+      </p:sp>
+      <p:sp>
+        <p:nvSpPr>
+          <p:cNvPr id="275" name="Google Shape;275;g27dfae2cb10_1_157:notes"/>
+          <p:cNvSpPr txBox="1">
+            <a:spLocks noGrp="1"/>
+          </p:cNvSpPr>
+          <p:nvPr>
+            <p:ph type="body" idx="1"/>
+          </p:nvPr>
+        </p:nvSpPr>
+        <p:spPr>
+          <a:xfrm>
+            <a:off x="685800" y="4343400"/>
+            <a:ext cx="5486400" cy="4114800"/>
+          </a:xfrm>
+          <a:prstGeom prst="rect">
+            <a:avLst/>
+          </a:prstGeom>
+        </p:spPr>
+        <p:txBody>
+          <a:bodyPr spcFirstLastPara="1" wrap="square" lIns="91425" tIns="91425" rIns="91425" bIns="91425" anchor="t" anchorCtr="0">
+            <a:noAutofit/>
+          </a:bodyPr>
+          <a:lstStyle/>
+          <a:p>
+            <a:pPr marL="0" lvl="0" indent="0" algn="l" rtl="0">
+              <a:spcBef>
+                <a:spcPts val="0"/>
+              </a:spcBef>
+              <a:spcAft>
+                <a:spcPts val="0"/>
+              </a:spcAft>
+              <a:buNone/>
+            </a:pPr>
+            <a:r>
+              <a:rPr lang="en-CA" dirty="0"/>
+              <a:t>- </a:t>
+            </a:r>
+            <a:r>
+              <a:rPr lang="en-CA" dirty="0" err="1"/>
+              <a:t>megan</a:t>
+            </a:r>
+            <a:r>
+              <a:rPr lang="en-CA" dirty="0"/>
+              <a:t> Takes over presenting</a:t>
+            </a:r>
+            <a:endParaRPr dirty="0"/>
+          </a:p>
+        </p:txBody>
+      </p:sp>
+    </p:spTree>
+  </p:cSld>
+  <p:clrMapOvr>
+    <a:masterClrMapping/>
+  </p:clrMapOvr>
+</p:notes>
+</file>
+
+<file path=ppt/notesSlides/notesSlide11.xml><?xml version="1.0" encoding="utf-8"?>
 <p:notes xmlns:a="http://schemas.openxmlformats.org/drawingml/2006/main" xmlns:r="http://schemas.openxmlformats.org/officeDocument/2006/relationships" xmlns:p="http://schemas.openxmlformats.org/presentationml/2006/main" showMasterSp="0" showMasterPhAnim="0">
   <p:cSld>
     <p:spTree>
@@ -1978,7 +1930,7 @@
 </p:notes>
 </file>
 
-<file path=ppt/notesSlides/notesSlide11.xml><?xml version="1.0" encoding="utf-8"?>
+<file path=ppt/notesSlides/notesSlide12.xml><?xml version="1.0" encoding="utf-8"?>
 <p:notes xmlns:a="http://schemas.openxmlformats.org/drawingml/2006/main" xmlns:r="http://schemas.openxmlformats.org/officeDocument/2006/relationships" xmlns:p="http://schemas.openxmlformats.org/presentationml/2006/main" showMasterSp="0" showMasterPhAnim="0">
   <p:cSld>
     <p:spTree>
@@ -2082,7 +2034,7 @@
 </p:notes>
 </file>
 
-<file path=ppt/notesSlides/notesSlide12.xml><?xml version="1.0" encoding="utf-8"?>
+<file path=ppt/notesSlides/notesSlide13.xml><?xml version="1.0" encoding="utf-8"?>
 <p:notes xmlns:a="http://schemas.openxmlformats.org/drawingml/2006/main" xmlns:r="http://schemas.openxmlformats.org/officeDocument/2006/relationships" xmlns:p="http://schemas.openxmlformats.org/presentationml/2006/main">
   <p:cSld>
     <p:spTree>
@@ -2210,310 +2162,6 @@
     <p:extLst>
       <p:ext uri="{BB962C8B-B14F-4D97-AF65-F5344CB8AC3E}">
         <p14:creationId xmlns:p14="http://schemas.microsoft.com/office/powerpoint/2010/main" val="3278029036"/>
-      </p:ext>
-    </p:extLst>
-  </p:cSld>
-  <p:clrMapOvr>
-    <a:masterClrMapping/>
-  </p:clrMapOvr>
-</p:notes>
-</file>
-
-<file path=ppt/notesSlides/notesSlide13.xml><?xml version="1.0" encoding="utf-8"?>
-<p:notes xmlns:a="http://schemas.openxmlformats.org/drawingml/2006/main" xmlns:r="http://schemas.openxmlformats.org/officeDocument/2006/relationships" xmlns:p="http://schemas.openxmlformats.org/presentationml/2006/main">
-  <p:cSld>
-    <p:spTree>
-      <p:nvGrpSpPr>
-        <p:cNvPr id="1" name=""/>
-        <p:cNvGrpSpPr/>
-        <p:nvPr/>
-      </p:nvGrpSpPr>
-      <p:grpSpPr>
-        <a:xfrm>
-          <a:off x="0" y="0"/>
-          <a:ext cx="0" cy="0"/>
-          <a:chOff x="0" y="0"/>
-          <a:chExt cx="0" cy="0"/>
-        </a:xfrm>
-      </p:grpSpPr>
-      <p:sp>
-        <p:nvSpPr>
-          <p:cNvPr id="2" name="Slide Image Placeholder 1"/>
-          <p:cNvSpPr>
-            <a:spLocks noGrp="1" noRot="1" noChangeAspect="1"/>
-          </p:cNvSpPr>
-          <p:nvPr>
-            <p:ph type="sldImg"/>
-          </p:nvPr>
-        </p:nvSpPr>
-        <p:spPr/>
-      </p:sp>
-      <p:sp>
-        <p:nvSpPr>
-          <p:cNvPr id="3" name="Notes Placeholder 2"/>
-          <p:cNvSpPr>
-            <a:spLocks noGrp="1"/>
-          </p:cNvSpPr>
-          <p:nvPr>
-            <p:ph type="body" idx="1"/>
-          </p:nvPr>
-        </p:nvSpPr>
-        <p:spPr/>
-        <p:txBody>
-          <a:bodyPr/>
-          <a:lstStyle/>
-          <a:p>
-            <a:pPr algn="l"/>
-            <a:r>
-              <a:rPr lang="en-CA" b="0" i="0" dirty="0">
-                <a:solidFill>
-                  <a:srgbClr val="606C71"/>
-                </a:solidFill>
-                <a:effectLst/>
-                <a:latin typeface="Open Sans" panose="020B0606030504020204" pitchFamily="34" charset="0"/>
-              </a:rPr>
-              <a:t>Variance, standard deviation, IQR, among other measures, can all be used to measure dispersion. </a:t>
-            </a:r>
-          </a:p>
-          <a:p>
-            <a:pPr algn="l"/>
-            <a:endParaRPr lang="en-CA" b="0" i="0" dirty="0">
-              <a:solidFill>
-                <a:srgbClr val="606C71"/>
-              </a:solidFill>
-              <a:effectLst/>
-              <a:latin typeface="Open Sans" panose="020B0606030504020204" pitchFamily="34" charset="0"/>
-            </a:endParaRPr>
-          </a:p>
-          <a:p>
-            <a:pPr algn="l"/>
-            <a:r>
-              <a:rPr lang="en-CA" b="0" i="0" dirty="0">
-                <a:solidFill>
-                  <a:srgbClr val="606C71"/>
-                </a:solidFill>
-                <a:effectLst/>
-                <a:latin typeface="Open Sans" panose="020B0606030504020204" pitchFamily="34" charset="0"/>
-              </a:rPr>
-              <a:t>DESeq2 uses a specific measure of dispersion (</a:t>
-            </a:r>
-            <a:r>
-              <a:rPr lang="el-GR" b="0" i="0" dirty="0">
-                <a:solidFill>
-                  <a:srgbClr val="606C71"/>
-                </a:solidFill>
-                <a:effectLst/>
-                <a:latin typeface="Open Sans" panose="020B0606030504020204" pitchFamily="34" charset="0"/>
-              </a:rPr>
-              <a:t>α) </a:t>
-            </a:r>
-            <a:r>
-              <a:rPr lang="en-CA" b="0" i="0" dirty="0">
-                <a:solidFill>
-                  <a:srgbClr val="606C71"/>
-                </a:solidFill>
-                <a:effectLst/>
-                <a:latin typeface="Open Sans" panose="020B0606030504020204" pitchFamily="34" charset="0"/>
-              </a:rPr>
-              <a:t>related to the mean (</a:t>
-            </a:r>
-            <a:r>
-              <a:rPr lang="el-GR" b="0" i="0" dirty="0">
-                <a:solidFill>
-                  <a:srgbClr val="606C71"/>
-                </a:solidFill>
-                <a:effectLst/>
-                <a:latin typeface="Open Sans" panose="020B0606030504020204" pitchFamily="34" charset="0"/>
-              </a:rPr>
-              <a:t>μ) </a:t>
-            </a:r>
-            <a:r>
-              <a:rPr lang="en-CA" b="0" i="0" dirty="0">
-                <a:solidFill>
-                  <a:srgbClr val="606C71"/>
-                </a:solidFill>
-                <a:effectLst/>
-                <a:latin typeface="Open Sans" panose="020B0606030504020204" pitchFamily="34" charset="0"/>
-              </a:rPr>
-              <a:t>and variance of the data:</a:t>
-            </a:r>
-          </a:p>
-          <a:p>
-            <a:pPr algn="l"/>
-            <a:endParaRPr lang="en-CA" b="0" i="0" dirty="0">
-              <a:solidFill>
-                <a:srgbClr val="606C71"/>
-              </a:solidFill>
-              <a:effectLst/>
-              <a:latin typeface="Open Sans" panose="020B0606030504020204" pitchFamily="34" charset="0"/>
-            </a:endParaRPr>
-          </a:p>
-          <a:p>
-            <a:pPr algn="l"/>
-            <a:r>
-              <a:rPr lang="en-CA" b="0" i="0" dirty="0">
-                <a:solidFill>
-                  <a:srgbClr val="606C71"/>
-                </a:solidFill>
-                <a:effectLst/>
-                <a:latin typeface="Open Sans" panose="020B0606030504020204" pitchFamily="34" charset="0"/>
-              </a:rPr>
-              <a:t>the square root of dispersion will be equal to the coefficient of variation (</a:t>
-            </a:r>
-            <a:r>
-              <a:rPr lang="en-CA" dirty="0"/>
-              <a:t>Var / </a:t>
-            </a:r>
-            <a:r>
-              <a:rPr lang="el-GR" dirty="0"/>
-              <a:t>μ</a:t>
-            </a:r>
-            <a:r>
-              <a:rPr lang="el-GR" b="0" i="0" dirty="0">
-                <a:solidFill>
-                  <a:srgbClr val="606C71"/>
-                </a:solidFill>
-                <a:effectLst/>
-                <a:latin typeface="Open Sans" panose="020B0606030504020204" pitchFamily="34" charset="0"/>
-              </a:rPr>
-              <a:t>). </a:t>
-            </a:r>
-            <a:endParaRPr lang="en-CA" b="0" i="0" dirty="0">
-              <a:solidFill>
-                <a:srgbClr val="606C71"/>
-              </a:solidFill>
-              <a:effectLst/>
-              <a:latin typeface="Open Sans" panose="020B0606030504020204" pitchFamily="34" charset="0"/>
-            </a:endParaRPr>
-          </a:p>
-          <a:p>
-            <a:pPr algn="l"/>
-            <a:endParaRPr lang="en-CA" b="1" i="0" dirty="0">
-              <a:solidFill>
-                <a:srgbClr val="606C71"/>
-              </a:solidFill>
-              <a:effectLst/>
-              <a:latin typeface="Open Sans" panose="020B0606030504020204" pitchFamily="34" charset="0"/>
-            </a:endParaRPr>
-          </a:p>
-          <a:p>
-            <a:pPr algn="l"/>
-            <a:r>
-              <a:rPr lang="en-CA" b="0" i="0" dirty="0">
-                <a:solidFill>
-                  <a:srgbClr val="606C71"/>
-                </a:solidFill>
-                <a:effectLst/>
-                <a:latin typeface="Open Sans" panose="020B0606030504020204" pitchFamily="34" charset="0"/>
-              </a:rPr>
-              <a:t>dispersion is </a:t>
-            </a:r>
-            <a:r>
-              <a:rPr lang="en-CA" b="1" i="0" dirty="0">
-                <a:solidFill>
-                  <a:srgbClr val="606C71"/>
-                </a:solidFill>
-                <a:effectLst/>
-                <a:latin typeface="Open Sans" panose="020B0606030504020204" pitchFamily="34" charset="0"/>
-              </a:rPr>
-              <a:t>inversely related to the mean</a:t>
-            </a:r>
-            <a:r>
-              <a:rPr lang="en-CA" b="0" i="0" dirty="0">
-                <a:solidFill>
-                  <a:srgbClr val="606C71"/>
-                </a:solidFill>
-                <a:effectLst/>
-                <a:latin typeface="Open Sans" panose="020B0606030504020204" pitchFamily="34" charset="0"/>
-              </a:rPr>
-              <a:t> and </a:t>
-            </a:r>
-            <a:r>
-              <a:rPr lang="en-CA" b="1" i="0" dirty="0">
-                <a:solidFill>
-                  <a:srgbClr val="606C71"/>
-                </a:solidFill>
-                <a:effectLst/>
-                <a:latin typeface="Open Sans" panose="020B0606030504020204" pitchFamily="34" charset="0"/>
-              </a:rPr>
-              <a:t>directly related to variance</a:t>
-            </a:r>
-            <a:r>
-              <a:rPr lang="en-CA" b="0" i="0" dirty="0">
-                <a:solidFill>
-                  <a:srgbClr val="606C71"/>
-                </a:solidFill>
-                <a:effectLst/>
-                <a:latin typeface="Open Sans" panose="020B0606030504020204" pitchFamily="34" charset="0"/>
-              </a:rPr>
-              <a:t>. </a:t>
-            </a:r>
-          </a:p>
-          <a:p>
-            <a:pPr algn="l"/>
-            <a:endParaRPr lang="en-CA" b="0" i="0" dirty="0">
-              <a:solidFill>
-                <a:srgbClr val="606C71"/>
-              </a:solidFill>
-              <a:effectLst/>
-              <a:latin typeface="Open Sans" panose="020B0606030504020204" pitchFamily="34" charset="0"/>
-            </a:endParaRPr>
-          </a:p>
-          <a:p>
-            <a:pPr algn="l"/>
-            <a:r>
-              <a:rPr lang="en-CA" b="0" i="0" dirty="0">
-                <a:solidFill>
-                  <a:srgbClr val="606C71"/>
-                </a:solidFill>
-                <a:effectLst/>
-                <a:latin typeface="Open Sans" panose="020B0606030504020204" pitchFamily="34" charset="0"/>
-              </a:rPr>
-              <a:t>So </a:t>
-            </a:r>
-            <a:r>
-              <a:rPr lang="en-CA" b="1" i="0" dirty="0">
-                <a:solidFill>
-                  <a:srgbClr val="606C71"/>
-                </a:solidFill>
-                <a:effectLst/>
-                <a:latin typeface="Open Sans" panose="020B0606030504020204" pitchFamily="34" charset="0"/>
-              </a:rPr>
-              <a:t>0.01 dispersion means 10% variation around the mean expected across biological replicates.</a:t>
-            </a:r>
-          </a:p>
-          <a:p>
-            <a:endParaRPr lang="en-US" dirty="0"/>
-          </a:p>
-        </p:txBody>
-      </p:sp>
-      <p:sp>
-        <p:nvSpPr>
-          <p:cNvPr id="4" name="Slide Number Placeholder 3"/>
-          <p:cNvSpPr>
-            <a:spLocks noGrp="1"/>
-          </p:cNvSpPr>
-          <p:nvPr>
-            <p:ph type="sldNum" sz="quarter" idx="5"/>
-          </p:nvPr>
-        </p:nvSpPr>
-        <p:spPr/>
-        <p:txBody>
-          <a:bodyPr/>
-          <a:lstStyle/>
-          <a:p>
-            <a:fld id="{DACBD60B-517C-4242-AE46-E1BD2D086542}" type="slidenum">
-              <a:rPr lang="fr-FR" smtClean="0"/>
-              <a:t>34</a:t>
-            </a:fld>
-            <a:endParaRPr lang="fr-FR"/>
-          </a:p>
-        </p:txBody>
-      </p:sp>
-    </p:spTree>
-    <p:extLst>
-      <p:ext uri="{BB962C8B-B14F-4D97-AF65-F5344CB8AC3E}">
-        <p14:creationId xmlns:p14="http://schemas.microsoft.com/office/powerpoint/2010/main" val="2936047079"/>
       </p:ext>
     </p:extLst>
   </p:cSld>
@@ -2567,6 +2215,310 @@
           <a:bodyPr/>
           <a:lstStyle/>
           <a:p>
+            <a:pPr algn="l"/>
+            <a:r>
+              <a:rPr lang="en-CA" b="0" i="0" dirty="0">
+                <a:solidFill>
+                  <a:srgbClr val="606C71"/>
+                </a:solidFill>
+                <a:effectLst/>
+                <a:latin typeface="Open Sans" panose="020B0606030504020204" pitchFamily="34" charset="0"/>
+              </a:rPr>
+              <a:t>Variance, standard deviation, IQR, among other measures, can all be used to measure dispersion. </a:t>
+            </a:r>
+          </a:p>
+          <a:p>
+            <a:pPr algn="l"/>
+            <a:endParaRPr lang="en-CA" b="0" i="0" dirty="0">
+              <a:solidFill>
+                <a:srgbClr val="606C71"/>
+              </a:solidFill>
+              <a:effectLst/>
+              <a:latin typeface="Open Sans" panose="020B0606030504020204" pitchFamily="34" charset="0"/>
+            </a:endParaRPr>
+          </a:p>
+          <a:p>
+            <a:pPr algn="l"/>
+            <a:r>
+              <a:rPr lang="en-CA" b="0" i="0" dirty="0">
+                <a:solidFill>
+                  <a:srgbClr val="606C71"/>
+                </a:solidFill>
+                <a:effectLst/>
+                <a:latin typeface="Open Sans" panose="020B0606030504020204" pitchFamily="34" charset="0"/>
+              </a:rPr>
+              <a:t>DESeq2 uses a specific measure of dispersion (</a:t>
+            </a:r>
+            <a:r>
+              <a:rPr lang="el-GR" b="0" i="0" dirty="0">
+                <a:solidFill>
+                  <a:srgbClr val="606C71"/>
+                </a:solidFill>
+                <a:effectLst/>
+                <a:latin typeface="Open Sans" panose="020B0606030504020204" pitchFamily="34" charset="0"/>
+              </a:rPr>
+              <a:t>α) </a:t>
+            </a:r>
+            <a:r>
+              <a:rPr lang="en-CA" b="0" i="0" dirty="0">
+                <a:solidFill>
+                  <a:srgbClr val="606C71"/>
+                </a:solidFill>
+                <a:effectLst/>
+                <a:latin typeface="Open Sans" panose="020B0606030504020204" pitchFamily="34" charset="0"/>
+              </a:rPr>
+              <a:t>related to the mean (</a:t>
+            </a:r>
+            <a:r>
+              <a:rPr lang="el-GR" b="0" i="0" dirty="0">
+                <a:solidFill>
+                  <a:srgbClr val="606C71"/>
+                </a:solidFill>
+                <a:effectLst/>
+                <a:latin typeface="Open Sans" panose="020B0606030504020204" pitchFamily="34" charset="0"/>
+              </a:rPr>
+              <a:t>μ) </a:t>
+            </a:r>
+            <a:r>
+              <a:rPr lang="en-CA" b="0" i="0" dirty="0">
+                <a:solidFill>
+                  <a:srgbClr val="606C71"/>
+                </a:solidFill>
+                <a:effectLst/>
+                <a:latin typeface="Open Sans" panose="020B0606030504020204" pitchFamily="34" charset="0"/>
+              </a:rPr>
+              <a:t>and variance of the data:</a:t>
+            </a:r>
+          </a:p>
+          <a:p>
+            <a:pPr algn="l"/>
+            <a:endParaRPr lang="en-CA" b="0" i="0" dirty="0">
+              <a:solidFill>
+                <a:srgbClr val="606C71"/>
+              </a:solidFill>
+              <a:effectLst/>
+              <a:latin typeface="Open Sans" panose="020B0606030504020204" pitchFamily="34" charset="0"/>
+            </a:endParaRPr>
+          </a:p>
+          <a:p>
+            <a:pPr algn="l"/>
+            <a:r>
+              <a:rPr lang="en-CA" b="0" i="0" dirty="0">
+                <a:solidFill>
+                  <a:srgbClr val="606C71"/>
+                </a:solidFill>
+                <a:effectLst/>
+                <a:latin typeface="Open Sans" panose="020B0606030504020204" pitchFamily="34" charset="0"/>
+              </a:rPr>
+              <a:t>the square root of dispersion will be equal to the coefficient of variation (</a:t>
+            </a:r>
+            <a:r>
+              <a:rPr lang="en-CA" dirty="0"/>
+              <a:t>Var / </a:t>
+            </a:r>
+            <a:r>
+              <a:rPr lang="el-GR" dirty="0"/>
+              <a:t>μ</a:t>
+            </a:r>
+            <a:r>
+              <a:rPr lang="el-GR" b="0" i="0" dirty="0">
+                <a:solidFill>
+                  <a:srgbClr val="606C71"/>
+                </a:solidFill>
+                <a:effectLst/>
+                <a:latin typeface="Open Sans" panose="020B0606030504020204" pitchFamily="34" charset="0"/>
+              </a:rPr>
+              <a:t>). </a:t>
+            </a:r>
+            <a:endParaRPr lang="en-CA" b="0" i="0" dirty="0">
+              <a:solidFill>
+                <a:srgbClr val="606C71"/>
+              </a:solidFill>
+              <a:effectLst/>
+              <a:latin typeface="Open Sans" panose="020B0606030504020204" pitchFamily="34" charset="0"/>
+            </a:endParaRPr>
+          </a:p>
+          <a:p>
+            <a:pPr algn="l"/>
+            <a:endParaRPr lang="en-CA" b="1" i="0" dirty="0">
+              <a:solidFill>
+                <a:srgbClr val="606C71"/>
+              </a:solidFill>
+              <a:effectLst/>
+              <a:latin typeface="Open Sans" panose="020B0606030504020204" pitchFamily="34" charset="0"/>
+            </a:endParaRPr>
+          </a:p>
+          <a:p>
+            <a:pPr algn="l"/>
+            <a:r>
+              <a:rPr lang="en-CA" b="0" i="0" dirty="0">
+                <a:solidFill>
+                  <a:srgbClr val="606C71"/>
+                </a:solidFill>
+                <a:effectLst/>
+                <a:latin typeface="Open Sans" panose="020B0606030504020204" pitchFamily="34" charset="0"/>
+              </a:rPr>
+              <a:t>dispersion is </a:t>
+            </a:r>
+            <a:r>
+              <a:rPr lang="en-CA" b="1" i="0" dirty="0">
+                <a:solidFill>
+                  <a:srgbClr val="606C71"/>
+                </a:solidFill>
+                <a:effectLst/>
+                <a:latin typeface="Open Sans" panose="020B0606030504020204" pitchFamily="34" charset="0"/>
+              </a:rPr>
+              <a:t>inversely related to the mean</a:t>
+            </a:r>
+            <a:r>
+              <a:rPr lang="en-CA" b="0" i="0" dirty="0">
+                <a:solidFill>
+                  <a:srgbClr val="606C71"/>
+                </a:solidFill>
+                <a:effectLst/>
+                <a:latin typeface="Open Sans" panose="020B0606030504020204" pitchFamily="34" charset="0"/>
+              </a:rPr>
+              <a:t> and </a:t>
+            </a:r>
+            <a:r>
+              <a:rPr lang="en-CA" b="1" i="0" dirty="0">
+                <a:solidFill>
+                  <a:srgbClr val="606C71"/>
+                </a:solidFill>
+                <a:effectLst/>
+                <a:latin typeface="Open Sans" panose="020B0606030504020204" pitchFamily="34" charset="0"/>
+              </a:rPr>
+              <a:t>directly related to variance</a:t>
+            </a:r>
+            <a:r>
+              <a:rPr lang="en-CA" b="0" i="0" dirty="0">
+                <a:solidFill>
+                  <a:srgbClr val="606C71"/>
+                </a:solidFill>
+                <a:effectLst/>
+                <a:latin typeface="Open Sans" panose="020B0606030504020204" pitchFamily="34" charset="0"/>
+              </a:rPr>
+              <a:t>. </a:t>
+            </a:r>
+          </a:p>
+          <a:p>
+            <a:pPr algn="l"/>
+            <a:endParaRPr lang="en-CA" b="0" i="0" dirty="0">
+              <a:solidFill>
+                <a:srgbClr val="606C71"/>
+              </a:solidFill>
+              <a:effectLst/>
+              <a:latin typeface="Open Sans" panose="020B0606030504020204" pitchFamily="34" charset="0"/>
+            </a:endParaRPr>
+          </a:p>
+          <a:p>
+            <a:pPr algn="l"/>
+            <a:r>
+              <a:rPr lang="en-CA" b="0" i="0" dirty="0">
+                <a:solidFill>
+                  <a:srgbClr val="606C71"/>
+                </a:solidFill>
+                <a:effectLst/>
+                <a:latin typeface="Open Sans" panose="020B0606030504020204" pitchFamily="34" charset="0"/>
+              </a:rPr>
+              <a:t>So </a:t>
+            </a:r>
+            <a:r>
+              <a:rPr lang="en-CA" b="1" i="0" dirty="0">
+                <a:solidFill>
+                  <a:srgbClr val="606C71"/>
+                </a:solidFill>
+                <a:effectLst/>
+                <a:latin typeface="Open Sans" panose="020B0606030504020204" pitchFamily="34" charset="0"/>
+              </a:rPr>
+              <a:t>0.01 dispersion means 10% variation around the mean expected across biological replicates.</a:t>
+            </a:r>
+          </a:p>
+          <a:p>
+            <a:endParaRPr lang="en-US" dirty="0"/>
+          </a:p>
+        </p:txBody>
+      </p:sp>
+      <p:sp>
+        <p:nvSpPr>
+          <p:cNvPr id="4" name="Slide Number Placeholder 3"/>
+          <p:cNvSpPr>
+            <a:spLocks noGrp="1"/>
+          </p:cNvSpPr>
+          <p:nvPr>
+            <p:ph type="sldNum" sz="quarter" idx="5"/>
+          </p:nvPr>
+        </p:nvSpPr>
+        <p:spPr/>
+        <p:txBody>
+          <a:bodyPr/>
+          <a:lstStyle/>
+          <a:p>
+            <a:fld id="{DACBD60B-517C-4242-AE46-E1BD2D086542}" type="slidenum">
+              <a:rPr lang="fr-FR" smtClean="0"/>
+              <a:t>34</a:t>
+            </a:fld>
+            <a:endParaRPr lang="fr-FR"/>
+          </a:p>
+        </p:txBody>
+      </p:sp>
+    </p:spTree>
+    <p:extLst>
+      <p:ext uri="{BB962C8B-B14F-4D97-AF65-F5344CB8AC3E}">
+        <p14:creationId xmlns:p14="http://schemas.microsoft.com/office/powerpoint/2010/main" val="2936047079"/>
+      </p:ext>
+    </p:extLst>
+  </p:cSld>
+  <p:clrMapOvr>
+    <a:masterClrMapping/>
+  </p:clrMapOvr>
+</p:notes>
+</file>
+
+<file path=ppt/notesSlides/notesSlide15.xml><?xml version="1.0" encoding="utf-8"?>
+<p:notes xmlns:a="http://schemas.openxmlformats.org/drawingml/2006/main" xmlns:r="http://schemas.openxmlformats.org/officeDocument/2006/relationships" xmlns:p="http://schemas.openxmlformats.org/presentationml/2006/main">
+  <p:cSld>
+    <p:spTree>
+      <p:nvGrpSpPr>
+        <p:cNvPr id="1" name=""/>
+        <p:cNvGrpSpPr/>
+        <p:nvPr/>
+      </p:nvGrpSpPr>
+      <p:grpSpPr>
+        <a:xfrm>
+          <a:off x="0" y="0"/>
+          <a:ext cx="0" cy="0"/>
+          <a:chOff x="0" y="0"/>
+          <a:chExt cx="0" cy="0"/>
+        </a:xfrm>
+      </p:grpSpPr>
+      <p:sp>
+        <p:nvSpPr>
+          <p:cNvPr id="2" name="Slide Image Placeholder 1"/>
+          <p:cNvSpPr>
+            <a:spLocks noGrp="1" noRot="1" noChangeAspect="1"/>
+          </p:cNvSpPr>
+          <p:nvPr>
+            <p:ph type="sldImg"/>
+          </p:nvPr>
+        </p:nvSpPr>
+        <p:spPr/>
+      </p:sp>
+      <p:sp>
+        <p:nvSpPr>
+          <p:cNvPr id="3" name="Notes Placeholder 2"/>
+          <p:cNvSpPr>
+            <a:spLocks noGrp="1"/>
+          </p:cNvSpPr>
+          <p:nvPr>
+            <p:ph type="body" idx="1"/>
+          </p:nvPr>
+        </p:nvSpPr>
+        <p:spPr/>
+        <p:txBody>
+          <a:bodyPr/>
+          <a:lstStyle/>
+          <a:p>
             <a:endParaRPr lang="en-US" dirty="0"/>
           </a:p>
         </p:txBody>
@@ -2626,6 +2578,254 @@
       </p:grpSpPr>
       <p:sp>
         <p:nvSpPr>
+          <p:cNvPr id="2" name="Espace réservé de l'image des diapositives 1"/>
+          <p:cNvSpPr>
+            <a:spLocks noGrp="1" noRot="1" noChangeAspect="1"/>
+          </p:cNvSpPr>
+          <p:nvPr>
+            <p:ph type="sldImg"/>
+          </p:nvPr>
+        </p:nvSpPr>
+        <p:spPr>
+          <a:xfrm>
+            <a:off x="1371600" y="1143000"/>
+            <a:ext cx="4114800" cy="3086100"/>
+          </a:xfrm>
+        </p:spPr>
+        <p:txBody>
+          <a:bodyPr/>
+          <a:lstStyle/>
+          <a:p>
+            <a:endParaRPr lang="en-CA"/>
+          </a:p>
+        </p:txBody>
+      </p:sp>
+      <p:sp>
+        <p:nvSpPr>
+          <p:cNvPr id="3" name="Espace réservé des notes 2"/>
+          <p:cNvSpPr>
+            <a:spLocks noGrp="1"/>
+          </p:cNvSpPr>
+          <p:nvPr>
+            <p:ph type="body" idx="1"/>
+          </p:nvPr>
+        </p:nvSpPr>
+        <p:spPr/>
+        <p:txBody>
+          <a:bodyPr/>
+          <a:lstStyle/>
+          <a:p>
+            <a:pPr marL="0" marR="0" lvl="0" indent="0" algn="l" defTabSz="914400" rtl="0" eaLnBrk="1" fontAlgn="auto" latinLnBrk="0" hangingPunct="1">
+              <a:lnSpc>
+                <a:spcPct val="100000"/>
+              </a:lnSpc>
+              <a:spcBef>
+                <a:spcPts val="0"/>
+              </a:spcBef>
+              <a:spcAft>
+                <a:spcPts val="0"/>
+              </a:spcAft>
+              <a:buClrTx/>
+              <a:buSzTx/>
+              <a:buFontTx/>
+              <a:buNone/>
+              <a:tabLst/>
+              <a:defRPr/>
+            </a:pPr>
+            <a:r>
+              <a:rPr lang="en-CA" sz="1200" dirty="0"/>
+              <a:t>The McGill initiative on Computational Medicine was formed in 2017 and aims to deliver inter-disciplinary research programs and empower the use of data in health research and health care delivery</a:t>
+            </a:r>
+          </a:p>
+          <a:p>
+            <a:pPr marL="0" marR="0" lvl="0" indent="0" algn="l" defTabSz="914400" rtl="0" eaLnBrk="1" fontAlgn="auto" latinLnBrk="0" hangingPunct="1">
+              <a:lnSpc>
+                <a:spcPct val="100000"/>
+              </a:lnSpc>
+              <a:spcBef>
+                <a:spcPts val="0"/>
+              </a:spcBef>
+              <a:spcAft>
+                <a:spcPts val="0"/>
+              </a:spcAft>
+              <a:buClrTx/>
+              <a:buSzTx/>
+              <a:buFontTx/>
+              <a:buNone/>
+              <a:tabLst/>
+              <a:defRPr/>
+            </a:pPr>
+            <a:r>
+              <a:rPr lang="en-CA" sz="1200" dirty="0"/>
+              <a:t>Located at the Genome Center</a:t>
+            </a:r>
+          </a:p>
+          <a:p>
+            <a:pPr marL="0" marR="0" lvl="0" indent="0" algn="l" defTabSz="914400" rtl="0" eaLnBrk="1" fontAlgn="auto" latinLnBrk="0" hangingPunct="1">
+              <a:lnSpc>
+                <a:spcPct val="100000"/>
+              </a:lnSpc>
+              <a:spcBef>
+                <a:spcPts val="0"/>
+              </a:spcBef>
+              <a:spcAft>
+                <a:spcPts val="0"/>
+              </a:spcAft>
+              <a:buClrTx/>
+              <a:buSzTx/>
+              <a:buFontTx/>
+              <a:buNone/>
+              <a:tabLst/>
+              <a:defRPr/>
+            </a:pPr>
+            <a:endParaRPr lang="en-CA" sz="1200" dirty="0"/>
+          </a:p>
+          <a:p>
+            <a:pPr marL="0" marR="0" lvl="0" indent="0" algn="l" defTabSz="914400" rtl="0" eaLnBrk="1" fontAlgn="auto" latinLnBrk="0" hangingPunct="1">
+              <a:lnSpc>
+                <a:spcPct val="100000"/>
+              </a:lnSpc>
+              <a:spcBef>
+                <a:spcPts val="0"/>
+              </a:spcBef>
+              <a:spcAft>
+                <a:spcPts val="0"/>
+              </a:spcAft>
+              <a:buClrTx/>
+              <a:buSzTx/>
+              <a:buFontTx/>
+              <a:buNone/>
+              <a:tabLst/>
+              <a:defRPr/>
+            </a:pPr>
+            <a:endParaRPr lang="en-CA" sz="1200" dirty="0"/>
+          </a:p>
+          <a:p>
+            <a:pPr marL="0" marR="0" lvl="0" indent="0" algn="l" defTabSz="914400" rtl="0" eaLnBrk="1" fontAlgn="auto" latinLnBrk="0" hangingPunct="1">
+              <a:lnSpc>
+                <a:spcPct val="100000"/>
+              </a:lnSpc>
+              <a:spcBef>
+                <a:spcPts val="0"/>
+              </a:spcBef>
+              <a:spcAft>
+                <a:spcPts val="0"/>
+              </a:spcAft>
+              <a:buClrTx/>
+              <a:buSzTx/>
+              <a:buFontTx/>
+              <a:buNone/>
+              <a:tabLst/>
+              <a:defRPr/>
+            </a:pPr>
+            <a:r>
+              <a:rPr lang="en-CA" sz="1200" dirty="0"/>
+              <a:t>They have a newsletter were you can subscribe to </a:t>
+            </a:r>
+          </a:p>
+          <a:p>
+            <a:pPr marL="0" marR="0" lvl="0" indent="0" algn="l" defTabSz="914400" rtl="0" eaLnBrk="1" fontAlgn="auto" latinLnBrk="0" hangingPunct="1">
+              <a:lnSpc>
+                <a:spcPct val="100000"/>
+              </a:lnSpc>
+              <a:spcBef>
+                <a:spcPts val="0"/>
+              </a:spcBef>
+              <a:spcAft>
+                <a:spcPts val="0"/>
+              </a:spcAft>
+              <a:buClrTx/>
+              <a:buSzTx/>
+              <a:buFontTx/>
+              <a:buNone/>
+              <a:tabLst/>
+              <a:defRPr/>
+            </a:pPr>
+            <a:endParaRPr lang="en-CA" sz="1200" dirty="0"/>
+          </a:p>
+          <a:p>
+            <a:pPr marL="0" marR="0" lvl="0" indent="0" algn="l" defTabSz="914400" rtl="0" eaLnBrk="1" fontAlgn="auto" latinLnBrk="0" hangingPunct="1">
+              <a:lnSpc>
+                <a:spcPct val="100000"/>
+              </a:lnSpc>
+              <a:spcBef>
+                <a:spcPts val="0"/>
+              </a:spcBef>
+              <a:spcAft>
+                <a:spcPts val="0"/>
+              </a:spcAft>
+              <a:buClrTx/>
+              <a:buSzTx/>
+              <a:buFontTx/>
+              <a:buNone/>
+              <a:tabLst/>
+              <a:defRPr/>
+            </a:pPr>
+            <a:r>
+              <a:rPr lang="en-CA" sz="1200" dirty="0"/>
+              <a:t>more info on the web site</a:t>
+            </a:r>
+          </a:p>
+          <a:p>
+            <a:endParaRPr lang="en-CA" dirty="0"/>
+          </a:p>
+        </p:txBody>
+      </p:sp>
+      <p:sp>
+        <p:nvSpPr>
+          <p:cNvPr id="4" name="Espace réservé du numéro de diapositive 3"/>
+          <p:cNvSpPr>
+            <a:spLocks noGrp="1"/>
+          </p:cNvSpPr>
+          <p:nvPr>
+            <p:ph type="sldNum" sz="quarter" idx="5"/>
+          </p:nvPr>
+        </p:nvSpPr>
+        <p:spPr/>
+        <p:txBody>
+          <a:bodyPr/>
+          <a:lstStyle/>
+          <a:p>
+            <a:fld id="{DACBD60B-517C-4242-AE46-E1BD2D086542}" type="slidenum">
+              <a:rPr lang="fr-FR" smtClean="0"/>
+              <a:t>2</a:t>
+            </a:fld>
+            <a:endParaRPr lang="fr-FR"/>
+          </a:p>
+        </p:txBody>
+      </p:sp>
+    </p:spTree>
+    <p:extLst>
+      <p:ext uri="{BB962C8B-B14F-4D97-AF65-F5344CB8AC3E}">
+        <p14:creationId xmlns:p14="http://schemas.microsoft.com/office/powerpoint/2010/main" val="3840063572"/>
+      </p:ext>
+    </p:extLst>
+  </p:cSld>
+  <p:clrMapOvr>
+    <a:masterClrMapping/>
+  </p:clrMapOvr>
+</p:notes>
+</file>
+
+<file path=ppt/notesSlides/notesSlide3.xml><?xml version="1.0" encoding="utf-8"?>
+<p:notes xmlns:a="http://schemas.openxmlformats.org/drawingml/2006/main" xmlns:r="http://schemas.openxmlformats.org/officeDocument/2006/relationships" xmlns:p="http://schemas.openxmlformats.org/presentationml/2006/main">
+  <p:cSld>
+    <p:spTree>
+      <p:nvGrpSpPr>
+        <p:cNvPr id="1" name=""/>
+        <p:cNvGrpSpPr/>
+        <p:nvPr/>
+      </p:nvGrpSpPr>
+      <p:grpSpPr>
+        <a:xfrm>
+          <a:off x="0" y="0"/>
+          <a:ext cx="0" cy="0"/>
+          <a:chOff x="0" y="0"/>
+          <a:chExt cx="0" cy="0"/>
+        </a:xfrm>
+      </p:grpSpPr>
+      <p:sp>
+        <p:nvSpPr>
           <p:cNvPr id="2" name="Slide Image Placeholder 1"/>
           <p:cNvSpPr>
             <a:spLocks noGrp="1" noRot="1" noChangeAspect="1"/>
@@ -2698,7 +2898,7 @@
 </p:notes>
 </file>
 
-<file path=ppt/notesSlides/notesSlide3.xml><?xml version="1.0" encoding="utf-8"?>
+<file path=ppt/notesSlides/notesSlide4.xml><?xml version="1.0" encoding="utf-8"?>
 <p:notes xmlns:a="http://schemas.openxmlformats.org/drawingml/2006/main" xmlns:r="http://schemas.openxmlformats.org/officeDocument/2006/relationships" xmlns:p="http://schemas.openxmlformats.org/presentationml/2006/main">
   <p:cSld>
     <p:spTree>
@@ -2789,7 +2989,7 @@
 </p:notes>
 </file>
 
-<file path=ppt/notesSlides/notesSlide4.xml><?xml version="1.0" encoding="utf-8"?>
+<file path=ppt/notesSlides/notesSlide5.xml><?xml version="1.0" encoding="utf-8"?>
 <p:notes xmlns:a="http://schemas.openxmlformats.org/drawingml/2006/main" xmlns:r="http://schemas.openxmlformats.org/officeDocument/2006/relationships" xmlns:p="http://schemas.openxmlformats.org/presentationml/2006/main" showMasterSp="0" showMasterPhAnim="0">
   <p:cSld>
     <p:spTree>
@@ -3158,7 +3358,7 @@
 </p:notes>
 </file>
 
-<file path=ppt/notesSlides/notesSlide5.xml><?xml version="1.0" encoding="utf-8"?>
+<file path=ppt/notesSlides/notesSlide6.xml><?xml version="1.0" encoding="utf-8"?>
 <p:notes xmlns:a="http://schemas.openxmlformats.org/drawingml/2006/main" xmlns:r="http://schemas.openxmlformats.org/officeDocument/2006/relationships" xmlns:p="http://schemas.openxmlformats.org/presentationml/2006/main" showMasterSp="0" showMasterPhAnim="0">
   <p:cSld>
     <p:spTree>
@@ -3262,7 +3462,7 @@
 </p:notes>
 </file>
 
-<file path=ppt/notesSlides/notesSlide6.xml><?xml version="1.0" encoding="utf-8"?>
+<file path=ppt/notesSlides/notesSlide7.xml><?xml version="1.0" encoding="utf-8"?>
 <p:notes xmlns:a="http://schemas.openxmlformats.org/drawingml/2006/main" xmlns:r="http://schemas.openxmlformats.org/officeDocument/2006/relationships" xmlns:p="http://schemas.openxmlformats.org/presentationml/2006/main">
   <p:cSld>
     <p:spTree>
@@ -3331,7 +3531,7 @@
 </p:notes>
 </file>
 
-<file path=ppt/notesSlides/notesSlide7.xml><?xml version="1.0" encoding="utf-8"?>
+<file path=ppt/notesSlides/notesSlide8.xml><?xml version="1.0" encoding="utf-8"?>
 <p:notes xmlns:a="http://schemas.openxmlformats.org/drawingml/2006/main" xmlns:r="http://schemas.openxmlformats.org/officeDocument/2006/relationships" xmlns:p="http://schemas.openxmlformats.org/presentationml/2006/main">
   <p:cSld>
     <p:spTree>
@@ -3418,7 +3618,7 @@
 </p:notes>
 </file>
 
-<file path=ppt/notesSlides/notesSlide8.xml><?xml version="1.0" encoding="utf-8"?>
+<file path=ppt/notesSlides/notesSlide9.xml><?xml version="1.0" encoding="utf-8"?>
 <p:notes xmlns:a="http://schemas.openxmlformats.org/drawingml/2006/main" xmlns:r="http://schemas.openxmlformats.org/officeDocument/2006/relationships" xmlns:p="http://schemas.openxmlformats.org/presentationml/2006/main">
   <p:cSld>
     <p:spTree>
@@ -3643,122 +3843,6 @@
         <p14:creationId xmlns:p14="http://schemas.microsoft.com/office/powerpoint/2010/main" val="575975959"/>
       </p:ext>
     </p:extLst>
-  </p:cSld>
-  <p:clrMapOvr>
-    <a:masterClrMapping/>
-  </p:clrMapOvr>
-</p:notes>
-</file>
-
-<file path=ppt/notesSlides/notesSlide9.xml><?xml version="1.0" encoding="utf-8"?>
-<p:notes xmlns:a="http://schemas.openxmlformats.org/drawingml/2006/main" xmlns:r="http://schemas.openxmlformats.org/officeDocument/2006/relationships" xmlns:p="http://schemas.openxmlformats.org/presentationml/2006/main" showMasterSp="0" showMasterPhAnim="0">
-  <p:cSld>
-    <p:spTree>
-      <p:nvGrpSpPr>
-        <p:cNvPr id="1" name="Shape 273"/>
-        <p:cNvGrpSpPr/>
-        <p:nvPr/>
-      </p:nvGrpSpPr>
-      <p:grpSpPr>
-        <a:xfrm>
-          <a:off x="0" y="0"/>
-          <a:ext cx="0" cy="0"/>
-          <a:chOff x="0" y="0"/>
-          <a:chExt cx="0" cy="0"/>
-        </a:xfrm>
-      </p:grpSpPr>
-      <p:sp>
-        <p:nvSpPr>
-          <p:cNvPr id="274" name="Google Shape;274;g27dfae2cb10_1_157:notes"/>
-          <p:cNvSpPr>
-            <a:spLocks noGrp="1" noRot="1" noChangeAspect="1"/>
-          </p:cNvSpPr>
-          <p:nvPr>
-            <p:ph type="sldImg" idx="2"/>
-          </p:nvPr>
-        </p:nvSpPr>
-        <p:spPr>
-          <a:xfrm>
-            <a:off x="381000" y="685800"/>
-            <a:ext cx="6096000" cy="3429000"/>
-          </a:xfrm>
-          <a:custGeom>
-            <a:avLst/>
-            <a:gdLst/>
-            <a:ahLst/>
-            <a:cxnLst/>
-            <a:rect l="l" t="t" r="r" b="b"/>
-            <a:pathLst>
-              <a:path w="120000" h="120000" extrusionOk="0">
-                <a:moveTo>
-                  <a:pt x="0" y="0"/>
-                </a:moveTo>
-                <a:lnTo>
-                  <a:pt x="120000" y="0"/>
-                </a:lnTo>
-                <a:lnTo>
-                  <a:pt x="120000" y="120000"/>
-                </a:lnTo>
-                <a:lnTo>
-                  <a:pt x="0" y="120000"/>
-                </a:lnTo>
-                <a:close/>
-              </a:path>
-            </a:pathLst>
-          </a:custGeom>
-        </p:spPr>
-      </p:sp>
-      <p:sp>
-        <p:nvSpPr>
-          <p:cNvPr id="275" name="Google Shape;275;g27dfae2cb10_1_157:notes"/>
-          <p:cNvSpPr txBox="1">
-            <a:spLocks noGrp="1"/>
-          </p:cNvSpPr>
-          <p:nvPr>
-            <p:ph type="body" idx="1"/>
-          </p:nvPr>
-        </p:nvSpPr>
-        <p:spPr>
-          <a:xfrm>
-            <a:off x="685800" y="4343400"/>
-            <a:ext cx="5486400" cy="4114800"/>
-          </a:xfrm>
-          <a:prstGeom prst="rect">
-            <a:avLst/>
-          </a:prstGeom>
-        </p:spPr>
-        <p:txBody>
-          <a:bodyPr spcFirstLastPara="1" wrap="square" lIns="91425" tIns="91425" rIns="91425" bIns="91425" anchor="t" anchorCtr="0">
-            <a:noAutofit/>
-          </a:bodyPr>
-          <a:lstStyle/>
-          <a:p>
-            <a:pPr marL="0" lvl="0" indent="0" algn="l" rtl="0">
-              <a:spcBef>
-                <a:spcPts val="0"/>
-              </a:spcBef>
-              <a:spcAft>
-                <a:spcPts val="0"/>
-              </a:spcAft>
-              <a:buNone/>
-            </a:pPr>
-            <a:r>
-              <a:rPr lang="en-CA" dirty="0"/>
-              <a:t>- </a:t>
-            </a:r>
-            <a:r>
-              <a:rPr lang="en-CA" dirty="0" err="1"/>
-              <a:t>megan</a:t>
-            </a:r>
-            <a:r>
-              <a:rPr lang="en-CA" dirty="0"/>
-              <a:t> Takes over presenting</a:t>
-            </a:r>
-            <a:endParaRPr dirty="0"/>
-          </a:p>
-        </p:txBody>
-      </p:sp>
-    </p:spTree>
   </p:cSld>
   <p:clrMapOvr>
     <a:masterClrMapping/>
@@ -8894,7 +8978,7 @@
           <p:nvPr/>
         </p:nvPicPr>
         <p:blipFill>
-          <a:blip r:embed="rId2"/>
+          <a:blip r:embed="rId3"/>
           <a:stretch>
             <a:fillRect/>
           </a:stretch>
@@ -8947,7 +9031,7 @@
             <a:pPr algn="r"/>
             <a:r>
               <a:rPr lang="en-CA" dirty="0"/>
-              <a:t>Oct. 22, 2025</a:t>
+              <a:t>June 02, 2026</a:t>
             </a:r>
           </a:p>
         </p:txBody>
@@ -8967,7 +9051,7 @@
           <p:nvPr/>
         </p:nvPicPr>
         <p:blipFill>
-          <a:blip r:embed="rId3"/>
+          <a:blip r:embed="rId4"/>
           <a:stretch>
             <a:fillRect/>
           </a:stretch>
@@ -8997,7 +9081,7 @@
           <p:nvPr/>
         </p:nvPicPr>
         <p:blipFill>
-          <a:blip r:embed="rId4"/>
+          <a:blip r:embed="rId5"/>
           <a:srcRect l="10407" t="26487" r="11222" b="27878"/>
           <a:stretch>
             <a:fillRect/>
@@ -9007,6 +9091,36 @@
           <a:xfrm>
             <a:off x="1176292" y="5509807"/>
             <a:ext cx="2440446" cy="785093"/>
+          </a:xfrm>
+          <a:prstGeom prst="rect">
+            <a:avLst/>
+          </a:prstGeom>
+        </p:spPr>
+      </p:pic>
+      <p:pic>
+        <p:nvPicPr>
+          <p:cNvPr id="5" name="Picture 4">
+            <a:extLst>
+              <a:ext uri="{FF2B5EF4-FFF2-40B4-BE49-F238E27FC236}">
+                <a16:creationId xmlns:a16="http://schemas.microsoft.com/office/drawing/2014/main" id="{FCC3C2F2-EA2A-3448-3708-B3826E03ED4B}"/>
+              </a:ext>
+            </a:extLst>
+          </p:cNvPr>
+          <p:cNvPicPr>
+            <a:picLocks noChangeAspect="1"/>
+          </p:cNvPicPr>
+          <p:nvPr/>
+        </p:nvPicPr>
+        <p:blipFill>
+          <a:blip r:embed="rId6"/>
+          <a:stretch>
+            <a:fillRect/>
+          </a:stretch>
+        </p:blipFill>
+        <p:spPr>
+          <a:xfrm>
+            <a:off x="0" y="6451144"/>
+            <a:ext cx="1951762" cy="342192"/>
           </a:xfrm>
           <a:prstGeom prst="rect">
             <a:avLst/>
@@ -10902,6 +11016,137 @@
             <a:r>
               <a:rPr lang="en-CA" dirty="0"/>
               <a:t>Gene length is the same for all samples.</a:t>
+            </a:r>
+          </a:p>
+        </p:txBody>
+      </p:sp>
+      <p:sp>
+        <p:nvSpPr>
+          <p:cNvPr id="7" name="Rectangle 6">
+            <a:extLst>
+              <a:ext uri="{FF2B5EF4-FFF2-40B4-BE49-F238E27FC236}">
+                <a16:creationId xmlns:a16="http://schemas.microsoft.com/office/drawing/2014/main" id="{06637134-D68F-5ECD-B20B-5916DD719ED3}"/>
+              </a:ext>
+            </a:extLst>
+          </p:cNvPr>
+          <p:cNvSpPr/>
+          <p:nvPr/>
+        </p:nvSpPr>
+        <p:spPr>
+          <a:xfrm>
+            <a:off x="2124589" y="5725419"/>
+            <a:ext cx="5035866" cy="878913"/>
+          </a:xfrm>
+          <a:prstGeom prst="rect">
+            <a:avLst/>
+          </a:prstGeom>
+        </p:spPr>
+        <p:style>
+          <a:lnRef idx="2">
+            <a:schemeClr val="accent1">
+              <a:shade val="15000"/>
+            </a:schemeClr>
+          </a:lnRef>
+          <a:fillRef idx="1">
+            <a:schemeClr val="accent1"/>
+          </a:fillRef>
+          <a:effectRef idx="0">
+            <a:schemeClr val="accent1"/>
+          </a:effectRef>
+          <a:fontRef idx="minor">
+            <a:schemeClr val="lt1"/>
+          </a:fontRef>
+        </p:style>
+        <p:txBody>
+          <a:bodyPr rtlCol="0" anchor="ctr"/>
+          <a:lstStyle/>
+          <a:p>
+            <a:pPr algn="ctr"/>
+            <a:endParaRPr lang="en-CA"/>
+          </a:p>
+        </p:txBody>
+      </p:sp>
+      <p:sp>
+        <p:nvSpPr>
+          <p:cNvPr id="8" name="TextBox 7">
+            <a:extLst>
+              <a:ext uri="{FF2B5EF4-FFF2-40B4-BE49-F238E27FC236}">
+                <a16:creationId xmlns:a16="http://schemas.microsoft.com/office/drawing/2014/main" id="{E668AB7C-752C-93FC-A09A-61F96875D820}"/>
+              </a:ext>
+            </a:extLst>
+          </p:cNvPr>
+          <p:cNvSpPr txBox="1"/>
+          <p:nvPr/>
+        </p:nvSpPr>
+        <p:spPr>
+          <a:xfrm>
+            <a:off x="2124589" y="5725419"/>
+            <a:ext cx="3347743" cy="646587"/>
+          </a:xfrm>
+          <a:prstGeom prst="rect">
+            <a:avLst/>
+          </a:prstGeom>
+          <a:noFill/>
+        </p:spPr>
+        <p:txBody>
+          <a:bodyPr wrap="square" rtlCol="0">
+            <a:spAutoFit/>
+          </a:bodyPr>
+          <a:lstStyle/>
+          <a:p>
+            <a:r>
+              <a:rPr lang="en-CA" dirty="0"/>
+              <a:t>When do we need this?</a:t>
+            </a:r>
+          </a:p>
+          <a:p>
+            <a:endParaRPr lang="en-CA" dirty="0"/>
+          </a:p>
+        </p:txBody>
+      </p:sp>
+      <p:sp>
+        <p:nvSpPr>
+          <p:cNvPr id="9" name="TextBox 8">
+            <a:extLst>
+              <a:ext uri="{FF2B5EF4-FFF2-40B4-BE49-F238E27FC236}">
+                <a16:creationId xmlns:a16="http://schemas.microsoft.com/office/drawing/2014/main" id="{EE060855-A3BD-44F1-1580-F55F2F243F66}"/>
+              </a:ext>
+            </a:extLst>
+          </p:cNvPr>
+          <p:cNvSpPr txBox="1"/>
+          <p:nvPr/>
+        </p:nvSpPr>
+        <p:spPr>
+          <a:xfrm>
+            <a:off x="2124589" y="5957745"/>
+            <a:ext cx="6057644" cy="646587"/>
+          </a:xfrm>
+          <a:prstGeom prst="rect">
+            <a:avLst/>
+          </a:prstGeom>
+          <a:noFill/>
+        </p:spPr>
+        <p:txBody>
+          <a:bodyPr wrap="square" rtlCol="0">
+            <a:spAutoFit/>
+          </a:bodyPr>
+          <a:lstStyle/>
+          <a:p>
+            <a:pPr marL="457200" indent="-457200">
+              <a:buAutoNum type="arabicParenBoth"/>
+            </a:pPr>
+            <a:r>
+              <a:rPr lang="en-CA" dirty="0"/>
+              <a:t>Compare within sample</a:t>
+            </a:r>
+          </a:p>
+          <a:p>
+            <a:pPr marL="457200" indent="-457200">
+              <a:buAutoNum type="arabicParenBoth"/>
+            </a:pPr>
+            <a:r>
+              <a:rPr lang="en-CA" dirty="0"/>
+              <a:t>Different conditions express different isoforms</a:t>
             </a:r>
           </a:p>
         </p:txBody>
@@ -11483,6 +11728,139 @@
                       </p:childTnLst>
                     </p:cTn>
                   </p:par>
+                  <p:par>
+                    <p:cTn id="45" fill="hold">
+                      <p:stCondLst>
+                        <p:cond delay="indefinite"/>
+                      </p:stCondLst>
+                      <p:childTnLst>
+                        <p:par>
+                          <p:cTn id="46" fill="hold">
+                            <p:stCondLst>
+                              <p:cond delay="0"/>
+                            </p:stCondLst>
+                            <p:childTnLst>
+                              <p:par>
+                                <p:cTn id="47" presetID="3" presetClass="entr" presetSubtype="10" fill="hold" grpId="0" nodeType="clickEffect">
+                                  <p:stCondLst>
+                                    <p:cond delay="0"/>
+                                  </p:stCondLst>
+                                  <p:childTnLst>
+                                    <p:set>
+                                      <p:cBhvr>
+                                        <p:cTn id="48" dur="1" fill="hold">
+                                          <p:stCondLst>
+                                            <p:cond delay="0"/>
+                                          </p:stCondLst>
+                                        </p:cTn>
+                                        <p:tgtEl>
+                                          <p:spTgt spid="7"/>
+                                        </p:tgtEl>
+                                        <p:attrNameLst>
+                                          <p:attrName>style.visibility</p:attrName>
+                                        </p:attrNameLst>
+                                      </p:cBhvr>
+                                      <p:to>
+                                        <p:strVal val="visible"/>
+                                      </p:to>
+                                    </p:set>
+                                    <p:animEffect transition="in" filter="blinds(horizontal)">
+                                      <p:cBhvr>
+                                        <p:cTn id="49" dur="500"/>
+                                        <p:tgtEl>
+                                          <p:spTgt spid="7"/>
+                                        </p:tgtEl>
+                                      </p:cBhvr>
+                                    </p:animEffect>
+                                  </p:childTnLst>
+                                </p:cTn>
+                              </p:par>
+                              <p:par>
+                                <p:cTn id="50" presetID="3" presetClass="entr" presetSubtype="10" fill="hold" grpId="0" nodeType="withEffect">
+                                  <p:stCondLst>
+                                    <p:cond delay="0"/>
+                                  </p:stCondLst>
+                                  <p:childTnLst>
+                                    <p:set>
+                                      <p:cBhvr>
+                                        <p:cTn id="51" dur="1" fill="hold">
+                                          <p:stCondLst>
+                                            <p:cond delay="0"/>
+                                          </p:stCondLst>
+                                        </p:cTn>
+                                        <p:tgtEl>
+                                          <p:spTgt spid="8"/>
+                                        </p:tgtEl>
+                                        <p:attrNameLst>
+                                          <p:attrName>style.visibility</p:attrName>
+                                        </p:attrNameLst>
+                                      </p:cBhvr>
+                                      <p:to>
+                                        <p:strVal val="visible"/>
+                                      </p:to>
+                                    </p:set>
+                                    <p:animEffect transition="in" filter="blinds(horizontal)">
+                                      <p:cBhvr>
+                                        <p:cTn id="52" dur="500"/>
+                                        <p:tgtEl>
+                                          <p:spTgt spid="8"/>
+                                        </p:tgtEl>
+                                      </p:cBhvr>
+                                    </p:animEffect>
+                                  </p:childTnLst>
+                                </p:cTn>
+                              </p:par>
+                            </p:childTnLst>
+                          </p:cTn>
+                        </p:par>
+                      </p:childTnLst>
+                    </p:cTn>
+                  </p:par>
+                  <p:par>
+                    <p:cTn id="53" fill="hold">
+                      <p:stCondLst>
+                        <p:cond delay="indefinite"/>
+                      </p:stCondLst>
+                      <p:childTnLst>
+                        <p:par>
+                          <p:cTn id="54" fill="hold">
+                            <p:stCondLst>
+                              <p:cond delay="0"/>
+                            </p:stCondLst>
+                            <p:childTnLst>
+                              <p:par>
+                                <p:cTn id="55" presetID="1" presetClass="entr" presetSubtype="0" fill="hold" grpId="0" nodeType="clickEffect">
+                                  <p:stCondLst>
+                                    <p:cond delay="0"/>
+                                  </p:stCondLst>
+                                  <p:childTnLst>
+                                    <p:set>
+                                      <p:cBhvr>
+                                        <p:cTn id="56" dur="1" fill="hold">
+                                          <p:stCondLst>
+                                            <p:cond delay="0"/>
+                                          </p:stCondLst>
+                                        </p:cTn>
+                                        <p:tgtEl>
+                                          <p:spTgt spid="9"/>
+                                        </p:tgtEl>
+                                        <p:attrNameLst>
+                                          <p:attrName>style.visibility</p:attrName>
+                                        </p:attrNameLst>
+                                      </p:cBhvr>
+                                      <p:to>
+                                        <p:strVal val="visible"/>
+                                      </p:to>
+                                    </p:set>
+                                  </p:childTnLst>
+                                </p:cTn>
+                              </p:par>
+                            </p:childTnLst>
+                          </p:cTn>
+                        </p:par>
+                      </p:childTnLst>
+                    </p:cTn>
+                  </p:par>
                 </p:childTnLst>
               </p:cTn>
               <p:prevCondLst>
@@ -11508,6 +11886,9 @@
       <p:bldP spid="5" grpId="0" animBg="1"/>
       <p:bldP spid="4" grpId="0"/>
       <p:bldP spid="6" grpId="0"/>
+      <p:bldP spid="7" grpId="0" animBg="1"/>
+      <p:bldP spid="8" grpId="0"/>
+      <p:bldP spid="9" grpId="0"/>
     </p:bldLst>
   </p:timing>
 </p:sld>
@@ -21679,7 +22060,7 @@
           <a:p>
             <a:r>
               <a:rPr lang="en-CA" dirty="0"/>
-              <a:t>Normalization Alternatives: Offset</a:t>
+              <a:t>Normalization in GLM: Offset</a:t>
             </a:r>
           </a:p>
         </p:txBody>
@@ -24608,15 +24989,6 @@
 </file>
 
 <file path=customXml/item1.xml><?xml version="1.0" encoding="utf-8"?>
-<?mso-contentType ?>
-<FormTemplates xmlns="http://schemas.microsoft.com/sharepoint/v3/contenttype/forms">
-  <Display>DocumentLibraryForm</Display>
-  <Edit>DocumentLibraryForm</Edit>
-  <New>DocumentLibraryForm</New>
-</FormTemplates>
-</file>
-
-<file path=customXml/item2.xml><?xml version="1.0" encoding="utf-8"?>
 <p:properties xmlns:p="http://schemas.microsoft.com/office/2006/metadata/properties" xmlns:xsi="http://www.w3.org/2001/XMLSchema-instance" xmlns:pc="http://schemas.microsoft.com/office/infopath/2007/PartnerControls">
   <documentManagement>
     <_activity xmlns="40cfa2c9-1ad5-4987-8821-92577427747a" xsi:nil="true"/>
@@ -24624,7 +24996,7 @@
 </p:properties>
 </file>
 
-<file path=customXml/item3.xml><?xml version="1.0" encoding="utf-8"?>
+<file path=customXml/item2.xml><?xml version="1.0" encoding="utf-8"?>
 <ct:contentTypeSchema xmlns:ct="http://schemas.microsoft.com/office/2006/metadata/contentType" xmlns:ma="http://schemas.microsoft.com/office/2006/metadata/properties/metaAttributes" ct:_="" ma:_="" ma:contentTypeName="Document" ma:contentTypeID="0x0101006EF577C8FE5D874C9CEC15964C265B0B" ma:contentTypeVersion="18" ma:contentTypeDescription="Create a new document." ma:contentTypeScope="" ma:versionID="b5b85860d85a39939875685a74abed7e">
   <xsd:schema xmlns:xsd="http://www.w3.org/2001/XMLSchema" xmlns:xs="http://www.w3.org/2001/XMLSchema" xmlns:p="http://schemas.microsoft.com/office/2006/metadata/properties" xmlns:ns3="40cfa2c9-1ad5-4987-8821-92577427747a" xmlns:ns4="2d0ab2d2-13db-47b5-abcb-bcddb615ace5" targetNamespace="http://schemas.microsoft.com/office/2006/metadata/properties" ma:root="true" ma:fieldsID="83bb5d34d71862227e313cc4bcf9c447" ns3:_="" ns4:_="">
     <xsd:import namespace="40cfa2c9-1ad5-4987-8821-92577427747a"/>
@@ -24877,15 +25249,16 @@
 </ct:contentTypeSchema>
 </file>
 
-<file path=customXml/itemProps1.xml><?xml version="1.0" encoding="utf-8"?>
-<ds:datastoreItem xmlns:ds="http://schemas.openxmlformats.org/officeDocument/2006/customXml" ds:itemID="{92B4619A-6AB4-4FEB-8E8A-0B4EE8D36E7C}">
-  <ds:schemaRefs>
-    <ds:schemaRef ds:uri="http://schemas.microsoft.com/sharepoint/v3/contenttype/forms"/>
-  </ds:schemaRefs>
-</ds:datastoreItem>
+<file path=customXml/item3.xml><?xml version="1.0" encoding="utf-8"?>
+<?mso-contentType ?>
+<FormTemplates xmlns="http://schemas.microsoft.com/sharepoint/v3/contenttype/forms">
+  <Display>DocumentLibraryForm</Display>
+  <Edit>DocumentLibraryForm</Edit>
+  <New>DocumentLibraryForm</New>
+</FormTemplates>
 </file>
 
-<file path=customXml/itemProps2.xml><?xml version="1.0" encoding="utf-8"?>
+<file path=customXml/itemProps1.xml><?xml version="1.0" encoding="utf-8"?>
 <ds:datastoreItem xmlns:ds="http://schemas.openxmlformats.org/officeDocument/2006/customXml" ds:itemID="{C72B4C65-C409-44AB-9E0D-847B5E8C5669}">
   <ds:schemaRefs>
     <ds:schemaRef ds:uri="http://schemas.microsoft.com/office/infopath/2007/PartnerControls"/>
@@ -24902,7 +25275,7 @@
 </ds:datastoreItem>
 </file>
 
-<file path=customXml/itemProps3.xml><?xml version="1.0" encoding="utf-8"?>
+<file path=customXml/itemProps2.xml><?xml version="1.0" encoding="utf-8"?>
 <ds:datastoreItem xmlns:ds="http://schemas.openxmlformats.org/officeDocument/2006/customXml" ds:itemID="{E2F2E6B4-8101-49F9-8E57-0B625D53FB3B}">
   <ds:schemaRefs>
     <ds:schemaRef ds:uri="http://schemas.microsoft.com/office/2006/metadata/contentType"/>
@@ -24919,4 +25292,12 @@
     <ds:schemaRef ds:uri="http://schemas.microsoft.com/internal/obd"/>
   </ds:schemaRefs>
 </ds:datastoreItem>
+</file>
+
+<file path=customXml/itemProps3.xml><?xml version="1.0" encoding="utf-8"?>
+<ds:datastoreItem xmlns:ds="http://schemas.openxmlformats.org/officeDocument/2006/customXml" ds:itemID="{92B4619A-6AB4-4FEB-8E8A-0B4EE8D36E7C}">
+  <ds:schemaRefs>
+    <ds:schemaRef ds:uri="http://schemas.microsoft.com/sharepoint/v3/contenttype/forms"/>
+  </ds:schemaRefs>
+</ds:datastoreItem>
 </file>